--- a/assets/rashtogo-directions/래쉬투고_찾아오시는길.pptx
+++ b/assets/rashtogo-directions/래쉬투고_찾아오시는길.pptx
@@ -1085,7 +1085,7 @@
         <p:spPr>
           <a:xfrm>
             <a:off x="822960" y="777240"/>
-            <a:ext cx="5120640" cy="320040"/>
+            <a:ext cx="5120640" cy="347472"/>
           </a:xfrm>
           <a:prstGeom prst="rect">
             <a:avLst/>
@@ -1101,17 +1101,17 @@
               <a:buNone/>
             </a:pPr>
             <a:r>
-              <a:rPr lang="en-US" sz="1400" b="1" spc="600" kern="0" dirty="0">
+              <a:rPr lang="en-US" sz="1500" spc="600" kern="0" dirty="0">
                 <a:solidFill>
                   <a:srgbClr val="C4708C"/>
                 </a:solidFill>
-                <a:latin typeface="Arial" pitchFamily="34" charset="0"/>
-                <a:ea typeface="Arial" pitchFamily="34" charset="-122"/>
-                <a:cs typeface="Arial" pitchFamily="34" charset="-120"/>
+                <a:latin typeface="강원교육튼튼" pitchFamily="34" charset="0"/>
+                <a:ea typeface="강원교육튼튼" pitchFamily="34" charset="-122"/>
+                <a:cs typeface="강원교육튼튼" pitchFamily="34" charset="-120"/>
               </a:rPr>
               <a:t>RASHTOGO</a:t>
             </a:r>
-            <a:endParaRPr lang="en-US" sz="1400" dirty="0"/>
+            <a:endParaRPr lang="en-US" sz="1500" dirty="0"/>
           </a:p>
         </p:txBody>
       </p:sp>
@@ -1140,13 +1140,13 @@
               <a:buNone/>
             </a:pPr>
             <a:r>
-              <a:rPr lang="en-US" sz="4000" b="1" dirty="0">
+              <a:rPr lang="en-US" sz="4000" dirty="0">
                 <a:solidFill>
                   <a:srgbClr val="FFFFFF"/>
                 </a:solidFill>
-                <a:latin typeface="맑은 고딕" pitchFamily="34" charset="0"/>
-                <a:ea typeface="맑은 고딕" pitchFamily="34" charset="-122"/>
-                <a:cs typeface="맑은 고딕" pitchFamily="34" charset="-120"/>
+                <a:latin typeface="강원교육모두 Bold" pitchFamily="34" charset="0"/>
+                <a:ea typeface="강원교육모두 Bold" pitchFamily="34" charset="-122"/>
+                <a:cs typeface="강원교육모두 Bold" pitchFamily="34" charset="-120"/>
               </a:rPr>
               <a:t>래쉬투고</a:t>
             </a:r>
@@ -1179,13 +1179,13 @@
               <a:buNone/>
             </a:pPr>
             <a:r>
-              <a:rPr lang="en-US" sz="4600" b="1" dirty="0">
+              <a:rPr lang="en-US" sz="4600" dirty="0">
                 <a:solidFill>
                   <a:srgbClr val="FFFFFF"/>
                 </a:solidFill>
-                <a:latin typeface="맑은 고딕" pitchFamily="34" charset="0"/>
-                <a:ea typeface="맑은 고딕" pitchFamily="34" charset="-122"/>
-                <a:cs typeface="맑은 고딕" pitchFamily="34" charset="-120"/>
+                <a:latin typeface="강원교육모두 Bold" pitchFamily="34" charset="0"/>
+                <a:ea typeface="강원교육모두 Bold" pitchFamily="34" charset="-122"/>
+                <a:cs typeface="강원교육모두 Bold" pitchFamily="34" charset="-120"/>
               </a:rPr>
               <a:t>찾아오시는 길</a:t>
             </a:r>
@@ -1247,13 +1247,13 @@
               <a:buNone/>
             </a:pPr>
             <a:r>
-              <a:rPr lang="en-US" sz="1700" b="1" dirty="0">
+              <a:rPr lang="en-US" sz="1700" dirty="0">
                 <a:solidFill>
                   <a:srgbClr val="FFFFFF"/>
                 </a:solidFill>
-                <a:latin typeface="맑은 고딕" pitchFamily="34" charset="0"/>
-                <a:ea typeface="맑은 고딕" pitchFamily="34" charset="-122"/>
-                <a:cs typeface="맑은 고딕" pitchFamily="34" charset="-120"/>
+                <a:latin typeface="KoPubWorld돋움체_Pro Bold" pitchFamily="34" charset="0"/>
+                <a:ea typeface="KoPubWorld돋움체_Pro Bold" pitchFamily="34" charset="-122"/>
+                <a:cs typeface="KoPubWorld돋움체_Pro Bold" pitchFamily="34" charset="-120"/>
               </a:rPr>
               <a:t>지하철 5호선 마곡역 3번 출구 · 도보 1분</a:t>
             </a:r>
@@ -1286,17 +1286,17 @@
               <a:buNone/>
             </a:pPr>
             <a:r>
-              <a:rPr lang="en-US" sz="1100" b="1" spc="400" kern="0" dirty="0">
+              <a:rPr lang="en-US" sz="1200" spc="400" kern="0" dirty="0">
                 <a:solidFill>
                   <a:srgbClr val="C4708C"/>
                 </a:solidFill>
-                <a:latin typeface="Arial" pitchFamily="34" charset="0"/>
-                <a:ea typeface="Arial" pitchFamily="34" charset="-122"/>
-                <a:cs typeface="Arial" pitchFamily="34" charset="-120"/>
+                <a:latin typeface="강원교육튼튼" pitchFamily="34" charset="0"/>
+                <a:ea typeface="강원교육튼튼" pitchFamily="34" charset="-122"/>
+                <a:cs typeface="강원교육튼튼" pitchFamily="34" charset="-120"/>
               </a:rPr>
               <a:t>ADDRESS</a:t>
             </a:r>
-            <a:endParaRPr lang="en-US" sz="1100" dirty="0"/>
+            <a:endParaRPr lang="en-US" sz="1200" dirty="0"/>
           </a:p>
         </p:txBody>
       </p:sp>
@@ -1325,13 +1325,13 @@
               <a:buNone/>
             </a:pPr>
             <a:r>
-              <a:rPr lang="en-US" sz="2000" b="1" dirty="0">
+              <a:rPr lang="en-US" sz="2000" dirty="0">
                 <a:solidFill>
                   <a:srgbClr val="FFFFFF"/>
                 </a:solidFill>
-                <a:latin typeface="맑은 고딕" pitchFamily="34" charset="0"/>
-                <a:ea typeface="맑은 고딕" pitchFamily="34" charset="-122"/>
-                <a:cs typeface="맑은 고딕" pitchFamily="34" charset="-120"/>
+                <a:latin typeface="KoPubWorld돋움체_Pro Bold" pitchFamily="34" charset="0"/>
+                <a:ea typeface="KoPubWorld돋움체_Pro Bold" pitchFamily="34" charset="-122"/>
+                <a:cs typeface="KoPubWorld돋움체_Pro Bold" pitchFamily="34" charset="-120"/>
               </a:rPr>
               <a:t>서울특별시 강서구 마곡동 773</a:t>
             </a:r>
@@ -1364,13 +1364,13 @@
               <a:buNone/>
             </a:pPr>
             <a:r>
-              <a:rPr lang="en-US" sz="2000" b="1" dirty="0">
+              <a:rPr lang="en-US" sz="2000" dirty="0">
                 <a:solidFill>
                   <a:srgbClr val="FFFFFF"/>
                 </a:solidFill>
-                <a:latin typeface="맑은 고딕" pitchFamily="34" charset="0"/>
-                <a:ea typeface="맑은 고딕" pitchFamily="34" charset="-122"/>
-                <a:cs typeface="맑은 고딕" pitchFamily="34" charset="-120"/>
+                <a:latin typeface="KoPubWorld돋움체_Pro Bold" pitchFamily="34" charset="0"/>
+                <a:ea typeface="KoPubWorld돋움체_Pro Bold" pitchFamily="34" charset="-122"/>
+                <a:cs typeface="KoPubWorld돋움체_Pro Bold" pitchFamily="34" charset="-120"/>
               </a:rPr>
               <a:t>힐스테이트 에코 마곡역  340호</a:t>
             </a:r>
@@ -1407,9 +1407,9 @@
                 <a:solidFill>
                   <a:srgbClr val="C9B9C0"/>
                 </a:solidFill>
-                <a:latin typeface="맑은 고딕" pitchFamily="34" charset="0"/>
-                <a:ea typeface="맑은 고딕" pitchFamily="34" charset="-122"/>
-                <a:cs typeface="맑은 고딕" pitchFamily="34" charset="-120"/>
+                <a:latin typeface="KoPubWorld돋움체_Pro Light" pitchFamily="34" charset="0"/>
+                <a:ea typeface="KoPubWorld돋움체_Pro Light" pitchFamily="34" charset="-122"/>
+                <a:cs typeface="KoPubWorld돋움체_Pro Light" pitchFamily="34" charset="-120"/>
               </a:rPr>
               <a:t>상가 / 오피스 엘리베이터 이용 · 3층</a:t>
             </a:r>
@@ -1425,8 +1425,8 @@
         </p:nvSpPr>
         <p:spPr>
           <a:xfrm>
-            <a:off x="822960" y="5779008"/>
-            <a:ext cx="5394960" cy="365760"/>
+            <a:off x="822960" y="5742432"/>
+            <a:ext cx="5394960" cy="411480"/>
           </a:xfrm>
           <a:prstGeom prst="rect">
             <a:avLst/>
@@ -1442,17 +1442,17 @@
               <a:buNone/>
             </a:pPr>
             <a:r>
-              <a:rPr lang="en-US" sz="1300" i="1" dirty="0">
+              <a:rPr lang="en-US" sz="1700" dirty="0">
                 <a:solidFill>
                   <a:srgbClr val="C4708C"/>
                 </a:solidFill>
-                <a:latin typeface="맑은 고딕" pitchFamily="34" charset="0"/>
-                <a:ea typeface="맑은 고딕" pitchFamily="34" charset="-122"/>
-                <a:cs typeface="맑은 고딕" pitchFamily="34" charset="-120"/>
+                <a:latin typeface="강원교육새음" pitchFamily="34" charset="0"/>
+                <a:ea typeface="강원교육새음" pitchFamily="34" charset="-122"/>
+                <a:cs typeface="강원교육새음" pitchFamily="34" charset="-120"/>
               </a:rPr>
               <a:t>마곡역 3번 출구에서 나와 직진하면 바로 보이는 건물입니다.</a:t>
             </a:r>
-            <a:endParaRPr lang="en-US" sz="1300" dirty="0"/>
+            <a:endParaRPr lang="en-US" sz="1700" dirty="0"/>
           </a:p>
         </p:txBody>
       </p:sp>
@@ -1513,13 +1513,13 @@
               <a:buNone/>
             </a:pPr>
             <a:r>
-              <a:rPr lang="en-US" sz="3600" b="1" dirty="0">
+              <a:rPr lang="en-US" sz="3600" dirty="0">
                 <a:solidFill>
                   <a:srgbClr val="2C2229"/>
                 </a:solidFill>
-                <a:latin typeface="맑은 고딕" pitchFamily="34" charset="0"/>
-                <a:ea typeface="맑은 고딕" pitchFamily="34" charset="-122"/>
-                <a:cs typeface="맑은 고딕" pitchFamily="34" charset="-120"/>
+                <a:latin typeface="강원교육모두 Bold" pitchFamily="34" charset="0"/>
+                <a:ea typeface="강원교육모두 Bold" pitchFamily="34" charset="-122"/>
+                <a:cs typeface="강원교육모두 Bold" pitchFamily="34" charset="-120"/>
               </a:rPr>
               <a:t>마곡역에서 오시는 길</a:t>
             </a:r>
@@ -1556,9 +1556,9 @@
                 <a:solidFill>
                   <a:srgbClr val="7B6A72"/>
                 </a:solidFill>
-                <a:latin typeface="맑은 고딕" pitchFamily="34" charset="0"/>
-                <a:ea typeface="맑은 고딕" pitchFamily="34" charset="-122"/>
-                <a:cs typeface="맑은 고딕" pitchFamily="34" charset="-120"/>
+                <a:latin typeface="KoPubWorld돋움체_Pro Light" pitchFamily="34" charset="0"/>
+                <a:ea typeface="KoPubWorld돋움체_Pro Light" pitchFamily="34" charset="-122"/>
+                <a:cs typeface="KoPubWorld돋움체_Pro Light" pitchFamily="34" charset="-120"/>
               </a:rPr>
               <a:t>3번 출구 기준 · 도보 1분</a:t>
             </a:r>
@@ -1613,13 +1613,13 @@
               <a:buNone/>
             </a:pPr>
             <a:r>
-              <a:rPr lang="en-US" sz="1500" b="1" dirty="0">
+              <a:rPr lang="en-US" sz="1500" dirty="0">
                 <a:solidFill>
                   <a:srgbClr val="6D2E46"/>
                 </a:solidFill>
-                <a:latin typeface="맑은 고딕" pitchFamily="34" charset="0"/>
-                <a:ea typeface="맑은 고딕" pitchFamily="34" charset="-122"/>
-                <a:cs typeface="맑은 고딕" pitchFamily="34" charset="-120"/>
+                <a:latin typeface="KoPubWorld돋움체_Pro Bold" pitchFamily="34" charset="0"/>
+                <a:ea typeface="KoPubWorld돋움체_Pro Bold" pitchFamily="34" charset="-122"/>
+                <a:cs typeface="KoPubWorld돋움체_Pro Bold" pitchFamily="34" charset="-120"/>
               </a:rPr>
               <a:t>총 3 STEP</a:t>
             </a:r>
@@ -1724,17 +1724,17 @@
               <a:buNone/>
             </a:pPr>
             <a:r>
-              <a:rPr lang="en-US" sz="2200" b="1" dirty="0">
+              <a:rPr lang="en-US" sz="2400" dirty="0">
                 <a:solidFill>
                   <a:srgbClr val="FFFFFF"/>
                 </a:solidFill>
-                <a:latin typeface="Arial" pitchFamily="34" charset="0"/>
-                <a:ea typeface="Arial" pitchFamily="34" charset="-122"/>
-                <a:cs typeface="Arial" pitchFamily="34" charset="-120"/>
+                <a:latin typeface="강원교육튼튼" pitchFamily="34" charset="0"/>
+                <a:ea typeface="강원교육튼튼" pitchFamily="34" charset="-122"/>
+                <a:cs typeface="강원교육튼튼" pitchFamily="34" charset="-120"/>
               </a:rPr>
               <a:t>1</a:t>
             </a:r>
-            <a:endParaRPr lang="en-US" sz="2200" dirty="0"/>
+            <a:endParaRPr lang="en-US" sz="2400" dirty="0"/>
           </a:p>
         </p:txBody>
       </p:sp>
@@ -1746,8 +1746,8 @@
         </p:nvSpPr>
         <p:spPr>
           <a:xfrm>
-            <a:off x="768096" y="4681728"/>
-            <a:ext cx="3063240" cy="411480"/>
+            <a:off x="768096" y="4663440"/>
+            <a:ext cx="3063240" cy="438912"/>
           </a:xfrm>
           <a:prstGeom prst="rect">
             <a:avLst/>
@@ -1763,17 +1763,17 @@
               <a:buNone/>
             </a:pPr>
             <a:r>
-              <a:rPr lang="en-US" sz="1900" b="1" dirty="0">
+              <a:rPr lang="en-US" sz="2000" dirty="0">
                 <a:solidFill>
                   <a:srgbClr val="2C2229"/>
                 </a:solidFill>
-                <a:latin typeface="맑은 고딕" pitchFamily="34" charset="0"/>
-                <a:ea typeface="맑은 고딕" pitchFamily="34" charset="-122"/>
-                <a:cs typeface="맑은 고딕" pitchFamily="34" charset="-120"/>
+                <a:latin typeface="강원교육모두 Bold" pitchFamily="34" charset="0"/>
+                <a:ea typeface="강원교육모두 Bold" pitchFamily="34" charset="-122"/>
+                <a:cs typeface="강원교육모두 Bold" pitchFamily="34" charset="-120"/>
               </a:rPr>
               <a:t>마곡역 3번 출구</a:t>
             </a:r>
-            <a:endParaRPr lang="en-US" sz="1900" dirty="0"/>
+            <a:endParaRPr lang="en-US" sz="2000" dirty="0"/>
           </a:p>
         </p:txBody>
       </p:sp>
@@ -1785,8 +1785,8 @@
         </p:nvSpPr>
         <p:spPr>
           <a:xfrm>
-            <a:off x="768096" y="5138928"/>
-            <a:ext cx="3063240" cy="713232"/>
+            <a:off x="768096" y="5157216"/>
+            <a:ext cx="3063240" cy="731520"/>
           </a:xfrm>
           <a:prstGeom prst="rect">
             <a:avLst/>
@@ -1800,7 +1800,7 @@
           <a:p>
             <a:pPr indent="0" marL="0">
               <a:lnSpc>
-                <a:spcPct val="125000"/>
+                <a:spcPct val="130000"/>
               </a:lnSpc>
               <a:buNone/>
             </a:pPr>
@@ -1809,9 +1809,9 @@
                 <a:solidFill>
                   <a:srgbClr val="7B6A72"/>
                 </a:solidFill>
-                <a:latin typeface="맑은 고딕" pitchFamily="34" charset="0"/>
-                <a:ea typeface="맑은 고딕" pitchFamily="34" charset="-122"/>
-                <a:cs typeface="맑은 고딕" pitchFamily="34" charset="-120"/>
+                <a:latin typeface="KoPubWorld돋움체_Pro Medium" pitchFamily="34" charset="0"/>
+                <a:ea typeface="KoPubWorld돋움체_Pro Medium" pitchFamily="34" charset="-122"/>
+                <a:cs typeface="KoPubWorld돋움체_Pro Medium" pitchFamily="34" charset="-120"/>
               </a:rPr>
               <a:t>출구로 나와 GS25 · 올렌즈(OLENS)가</a:t>
             </a:r>
@@ -1820,7 +1820,7 @@
           <a:p>
             <a:pPr indent="0" marL="0">
               <a:lnSpc>
-                <a:spcPct val="125000"/>
+                <a:spcPct val="130000"/>
               </a:lnSpc>
               <a:buNone/>
             </a:pPr>
@@ -1829,9 +1829,9 @@
                 <a:solidFill>
                   <a:srgbClr val="7B6A72"/>
                 </a:solidFill>
-                <a:latin typeface="맑은 고딕" pitchFamily="34" charset="0"/>
-                <a:ea typeface="맑은 고딕" pitchFamily="34" charset="-122"/>
-                <a:cs typeface="맑은 고딕" pitchFamily="34" charset="-120"/>
+                <a:latin typeface="KoPubWorld돋움체_Pro Medium" pitchFamily="34" charset="0"/>
+                <a:ea typeface="KoPubWorld돋움체_Pro Medium" pitchFamily="34" charset="-122"/>
+                <a:cs typeface="KoPubWorld돋움체_Pro Medium" pitchFamily="34" charset="-120"/>
               </a:rPr>
               <a:t>있는 상가 방향으로 직진합니다.</a:t>
             </a:r>
@@ -1936,17 +1936,17 @@
               <a:buNone/>
             </a:pPr>
             <a:r>
-              <a:rPr lang="en-US" sz="2200" b="1" dirty="0">
+              <a:rPr lang="en-US" sz="2400" dirty="0">
                 <a:solidFill>
                   <a:srgbClr val="FFFFFF"/>
                 </a:solidFill>
-                <a:latin typeface="Arial" pitchFamily="34" charset="0"/>
-                <a:ea typeface="Arial" pitchFamily="34" charset="-122"/>
-                <a:cs typeface="Arial" pitchFamily="34" charset="-120"/>
+                <a:latin typeface="강원교육튼튼" pitchFamily="34" charset="0"/>
+                <a:ea typeface="강원교육튼튼" pitchFamily="34" charset="-122"/>
+                <a:cs typeface="강원교육튼튼" pitchFamily="34" charset="-120"/>
               </a:rPr>
               <a:t>2</a:t>
             </a:r>
-            <a:endParaRPr lang="en-US" sz="2200" dirty="0"/>
+            <a:endParaRPr lang="en-US" sz="2400" dirty="0"/>
           </a:p>
         </p:txBody>
       </p:sp>
@@ -1958,8 +1958,8 @@
         </p:nvSpPr>
         <p:spPr>
           <a:xfrm>
-            <a:off x="4562856" y="4681728"/>
-            <a:ext cx="3063240" cy="411480"/>
+            <a:off x="4562856" y="4663440"/>
+            <a:ext cx="3063240" cy="438912"/>
           </a:xfrm>
           <a:prstGeom prst="rect">
             <a:avLst/>
@@ -1975,17 +1975,17 @@
               <a:buNone/>
             </a:pPr>
             <a:r>
-              <a:rPr lang="en-US" sz="1900" b="1" dirty="0">
+              <a:rPr lang="en-US" sz="2000" dirty="0">
                 <a:solidFill>
                   <a:srgbClr val="2C2229"/>
                 </a:solidFill>
-                <a:latin typeface="맑은 고딕" pitchFamily="34" charset="0"/>
-                <a:ea typeface="맑은 고딕" pitchFamily="34" charset="-122"/>
-                <a:cs typeface="맑은 고딕" pitchFamily="34" charset="-120"/>
+                <a:latin typeface="강원교육모두 Bold" pitchFamily="34" charset="0"/>
+                <a:ea typeface="강원교육모두 Bold" pitchFamily="34" charset="-122"/>
+                <a:cs typeface="강원교육모두 Bold" pitchFamily="34" charset="-120"/>
               </a:rPr>
               <a:t>GATE 1 입구 진입</a:t>
             </a:r>
-            <a:endParaRPr lang="en-US" sz="1900" dirty="0"/>
+            <a:endParaRPr lang="en-US" sz="2000" dirty="0"/>
           </a:p>
         </p:txBody>
       </p:sp>
@@ -1997,8 +1997,8 @@
         </p:nvSpPr>
         <p:spPr>
           <a:xfrm>
-            <a:off x="4562856" y="5138928"/>
-            <a:ext cx="3063240" cy="713232"/>
+            <a:off x="4562856" y="5157216"/>
+            <a:ext cx="3063240" cy="731520"/>
           </a:xfrm>
           <a:prstGeom prst="rect">
             <a:avLst/>
@@ -2012,7 +2012,7 @@
           <a:p>
             <a:pPr indent="0" marL="0">
               <a:lnSpc>
-                <a:spcPct val="125000"/>
+                <a:spcPct val="130000"/>
               </a:lnSpc>
               <a:buNone/>
             </a:pPr>
@@ -2021,9 +2021,9 @@
                 <a:solidFill>
                   <a:srgbClr val="7B6A72"/>
                 </a:solidFill>
-                <a:latin typeface="맑은 고딕" pitchFamily="34" charset="0"/>
-                <a:ea typeface="맑은 고딕" pitchFamily="34" charset="-122"/>
-                <a:cs typeface="맑은 고딕" pitchFamily="34" charset="-120"/>
+                <a:latin typeface="KoPubWorld돋움체_Pro Medium" pitchFamily="34" charset="0"/>
+                <a:ea typeface="KoPubWorld돋움체_Pro Medium" pitchFamily="34" charset="-122"/>
+                <a:cs typeface="KoPubWorld돋움체_Pro Medium" pitchFamily="34" charset="-120"/>
               </a:rPr>
               <a:t>올렌즈와 나이스공인중개사무소 사이</a:t>
             </a:r>
@@ -2032,7 +2032,7 @@
           <a:p>
             <a:pPr indent="0" marL="0">
               <a:lnSpc>
-                <a:spcPct val="125000"/>
+                <a:spcPct val="130000"/>
               </a:lnSpc>
               <a:buNone/>
             </a:pPr>
@@ -2041,9 +2041,9 @@
                 <a:solidFill>
                   <a:srgbClr val="7B6A72"/>
                 </a:solidFill>
-                <a:latin typeface="맑은 고딕" pitchFamily="34" charset="0"/>
-                <a:ea typeface="맑은 고딕" pitchFamily="34" charset="-122"/>
-                <a:cs typeface="맑은 고딕" pitchFamily="34" charset="-120"/>
+                <a:latin typeface="KoPubWorld돋움체_Pro Medium" pitchFamily="34" charset="0"/>
+                <a:ea typeface="KoPubWorld돋움체_Pro Medium" pitchFamily="34" charset="-122"/>
+                <a:cs typeface="KoPubWorld돋움체_Pro Medium" pitchFamily="34" charset="-120"/>
               </a:rPr>
               <a:t>‘GATE 1’ 통로로 들어갑니다.</a:t>
             </a:r>
@@ -2148,17 +2148,17 @@
               <a:buNone/>
             </a:pPr>
             <a:r>
-              <a:rPr lang="en-US" sz="2200" b="1" dirty="0">
+              <a:rPr lang="en-US" sz="2400" dirty="0">
                 <a:solidFill>
                   <a:srgbClr val="FFFFFF"/>
                 </a:solidFill>
-                <a:latin typeface="Arial" pitchFamily="34" charset="0"/>
-                <a:ea typeface="Arial" pitchFamily="34" charset="-122"/>
-                <a:cs typeface="Arial" pitchFamily="34" charset="-120"/>
+                <a:latin typeface="강원교육튼튼" pitchFamily="34" charset="0"/>
+                <a:ea typeface="강원교육튼튼" pitchFamily="34" charset="-122"/>
+                <a:cs typeface="강원교육튼튼" pitchFamily="34" charset="-120"/>
               </a:rPr>
               <a:t>3</a:t>
             </a:r>
-            <a:endParaRPr lang="en-US" sz="2200" dirty="0"/>
+            <a:endParaRPr lang="en-US" sz="2400" dirty="0"/>
           </a:p>
         </p:txBody>
       </p:sp>
@@ -2170,8 +2170,8 @@
         </p:nvSpPr>
         <p:spPr>
           <a:xfrm>
-            <a:off x="8357616" y="4681728"/>
-            <a:ext cx="3063240" cy="411480"/>
+            <a:off x="8357616" y="4663440"/>
+            <a:ext cx="3063240" cy="438912"/>
           </a:xfrm>
           <a:prstGeom prst="rect">
             <a:avLst/>
@@ -2187,17 +2187,17 @@
               <a:buNone/>
             </a:pPr>
             <a:r>
-              <a:rPr lang="en-US" sz="1900" b="1" dirty="0">
+              <a:rPr lang="en-US" sz="2000" dirty="0">
                 <a:solidFill>
                   <a:srgbClr val="2C2229"/>
                 </a:solidFill>
-                <a:latin typeface="맑은 고딕" pitchFamily="34" charset="0"/>
-                <a:ea typeface="맑은 고딕" pitchFamily="34" charset="-122"/>
-                <a:cs typeface="맑은 고딕" pitchFamily="34" charset="-120"/>
+                <a:latin typeface="강원교육모두 Bold" pitchFamily="34" charset="0"/>
+                <a:ea typeface="강원교육모두 Bold" pitchFamily="34" charset="-122"/>
+                <a:cs typeface="강원교육모두 Bold" pitchFamily="34" charset="-120"/>
               </a:rPr>
               <a:t>GATE 4 엘리베이터</a:t>
             </a:r>
-            <a:endParaRPr lang="en-US" sz="1900" dirty="0"/>
+            <a:endParaRPr lang="en-US" sz="2000" dirty="0"/>
           </a:p>
         </p:txBody>
       </p:sp>
@@ -2209,8 +2209,8 @@
         </p:nvSpPr>
         <p:spPr>
           <a:xfrm>
-            <a:off x="8357616" y="5138928"/>
-            <a:ext cx="3063240" cy="713232"/>
+            <a:off x="8357616" y="5157216"/>
+            <a:ext cx="3063240" cy="731520"/>
           </a:xfrm>
           <a:prstGeom prst="rect">
             <a:avLst/>
@@ -2224,7 +2224,7 @@
           <a:p>
             <a:pPr indent="0" marL="0">
               <a:lnSpc>
-                <a:spcPct val="125000"/>
+                <a:spcPct val="130000"/>
               </a:lnSpc>
               <a:buNone/>
             </a:pPr>
@@ -2233,9 +2233,9 @@
                 <a:solidFill>
                   <a:srgbClr val="7B6A72"/>
                 </a:solidFill>
-                <a:latin typeface="맑은 고딕" pitchFamily="34" charset="0"/>
-                <a:ea typeface="맑은 고딕" pitchFamily="34" charset="-122"/>
-                <a:cs typeface="맑은 고딕" pitchFamily="34" charset="-120"/>
+                <a:latin typeface="KoPubWorld돋움체_Pro Medium" pitchFamily="34" charset="0"/>
+                <a:ea typeface="KoPubWorld돋움체_Pro Medium" pitchFamily="34" charset="-122"/>
+                <a:cs typeface="KoPubWorld돋움체_Pro Medium" pitchFamily="34" charset="-120"/>
               </a:rPr>
               <a:t>통로 안쪽 ‘상가 / 오피스’ GATE 4에서</a:t>
             </a:r>
@@ -2244,7 +2244,7 @@
           <a:p>
             <a:pPr indent="0" marL="0">
               <a:lnSpc>
-                <a:spcPct val="125000"/>
+                <a:spcPct val="130000"/>
               </a:lnSpc>
               <a:buNone/>
             </a:pPr>
@@ -2253,9 +2253,9 @@
                 <a:solidFill>
                   <a:srgbClr val="7B6A72"/>
                 </a:solidFill>
-                <a:latin typeface="맑은 고딕" pitchFamily="34" charset="0"/>
-                <a:ea typeface="맑은 고딕" pitchFamily="34" charset="-122"/>
-                <a:cs typeface="맑은 고딕" pitchFamily="34" charset="-120"/>
+                <a:latin typeface="KoPubWorld돋움체_Pro Medium" pitchFamily="34" charset="0"/>
+                <a:ea typeface="KoPubWorld돋움체_Pro Medium" pitchFamily="34" charset="-122"/>
+                <a:cs typeface="KoPubWorld돋움체_Pro Medium" pitchFamily="34" charset="-120"/>
               </a:rPr>
               <a:t>엘리베이터를 타고 3층으로 갑니다.</a:t>
             </a:r>
@@ -2320,15 +2320,15 @@
               <a:buNone/>
             </a:pPr>
             <a:r>
-              <a:rPr lang="en-US" sz="3600" b="1" dirty="0">
+              <a:rPr lang="en-US" sz="3600" dirty="0">
                 <a:solidFill>
                   <a:srgbClr val="2C2229"/>
                 </a:solidFill>
-                <a:latin typeface="맑은 고딕" pitchFamily="34" charset="0"/>
-                <a:ea typeface="맑은 고딕" pitchFamily="34" charset="-122"/>
-                <a:cs typeface="맑은 고딕" pitchFamily="34" charset="-120"/>
-              </a:rPr>
-              <a:t>도착 · 3층 340호</a:t>
+                <a:latin typeface="강원교육모두 Bold" pitchFamily="34" charset="0"/>
+                <a:ea typeface="강원교육모두 Bold" pitchFamily="34" charset="-122"/>
+                <a:cs typeface="강원교육모두 Bold" pitchFamily="34" charset="-120"/>
+              </a:rPr>
+              <a:t>3층 340호 도착</a:t>
             </a:r>
             <a:endParaRPr lang="en-US" sz="3600" dirty="0"/>
           </a:p>
@@ -2363,9 +2363,9 @@
                 <a:solidFill>
                   <a:srgbClr val="7B6A72"/>
                 </a:solidFill>
-                <a:latin typeface="맑은 고딕" pitchFamily="34" charset="0"/>
-                <a:ea typeface="맑은 고딕" pitchFamily="34" charset="-122"/>
-                <a:cs typeface="맑은 고딕" pitchFamily="34" charset="-120"/>
+                <a:latin typeface="KoPubWorld돋움체_Pro Light" pitchFamily="34" charset="0"/>
+                <a:ea typeface="KoPubWorld돋움체_Pro Light" pitchFamily="34" charset="-122"/>
+                <a:cs typeface="KoPubWorld돋움체_Pro Light" pitchFamily="34" charset="-120"/>
               </a:rPr>
               <a:t>엘리베이터 홀에서 3층 버튼을 눌러 주세요.</a:t>
             </a:r>
@@ -2427,13 +2427,13 @@
               <a:buNone/>
             </a:pPr>
             <a:r>
-              <a:rPr lang="en-US" sz="6000" b="1" dirty="0">
+              <a:rPr lang="en-US" sz="6200" dirty="0">
                 <a:solidFill>
                   <a:srgbClr val="FFFFFF"/>
                 </a:solidFill>
-                <a:latin typeface="Arial" pitchFamily="34" charset="0"/>
-                <a:ea typeface="Arial" pitchFamily="34" charset="-122"/>
-                <a:cs typeface="Arial" pitchFamily="34" charset="-120"/>
+                <a:latin typeface="강원교육튼튼" pitchFamily="34" charset="0"/>
+                <a:ea typeface="강원교육튼튼" pitchFamily="34" charset="-122"/>
+                <a:cs typeface="강원교육튼튼" pitchFamily="34" charset="-120"/>
               </a:rPr>
               <a:t>340</a:t>
             </a:r>
@@ -2441,17 +2441,17 @@
               <a:buNone/>
             </a:pPr>
             <a:r>
-              <a:rPr lang="en-US" sz="3000" b="1" dirty="0">
+              <a:rPr lang="en-US" sz="3000" dirty="0">
                 <a:solidFill>
                   <a:srgbClr val="C4708C"/>
                 </a:solidFill>
-                <a:latin typeface="맑은 고딕" pitchFamily="34" charset="0"/>
-                <a:ea typeface="맑은 고딕" pitchFamily="34" charset="-122"/>
-                <a:cs typeface="맑은 고딕" pitchFamily="34" charset="-120"/>
+                <a:latin typeface="강원교육튼튼" pitchFamily="34" charset="0"/>
+                <a:ea typeface="강원교육튼튼" pitchFamily="34" charset="-122"/>
+                <a:cs typeface="강원교육튼튼" pitchFamily="34" charset="-120"/>
               </a:rPr>
               <a:t>호</a:t>
             </a:r>
-            <a:endParaRPr lang="en-US" sz="6000" dirty="0"/>
+            <a:endParaRPr lang="en-US" sz="6200" dirty="0"/>
           </a:p>
         </p:txBody>
       </p:sp>
@@ -2484,9 +2484,9 @@
                 <a:solidFill>
                   <a:srgbClr val="C9B9C0"/>
                 </a:solidFill>
-                <a:latin typeface="맑은 고딕" pitchFamily="34" charset="0"/>
-                <a:ea typeface="맑은 고딕" pitchFamily="34" charset="-122"/>
-                <a:cs typeface="맑은 고딕" pitchFamily="34" charset="-120"/>
+                <a:latin typeface="KoPubWorld돋움체_Pro Light" pitchFamily="34" charset="0"/>
+                <a:ea typeface="KoPubWorld돋움체_Pro Light" pitchFamily="34" charset="-122"/>
+                <a:cs typeface="KoPubWorld돋움체_Pro Light" pitchFamily="34" charset="-120"/>
               </a:rPr>
               <a:t>힐스테이트 에코 마곡역 상가 3층</a:t>
             </a:r>
@@ -2502,8 +2502,8 @@
         </p:nvSpPr>
         <p:spPr>
           <a:xfrm>
-            <a:off x="548640" y="3858768"/>
-            <a:ext cx="4754880" cy="320040"/>
+            <a:off x="548640" y="3840480"/>
+            <a:ext cx="4754880" cy="365760"/>
           </a:xfrm>
           <a:prstGeom prst="rect">
             <a:avLst/>
@@ -2519,17 +2519,17 @@
               <a:buNone/>
             </a:pPr>
             <a:r>
-              <a:rPr lang="en-US" sz="1200" dirty="0">
+              <a:rPr lang="en-US" sz="1500" dirty="0">
                 <a:solidFill>
                   <a:srgbClr val="7B6A72"/>
                 </a:solidFill>
-                <a:latin typeface="맑은 고딕" pitchFamily="34" charset="0"/>
-                <a:ea typeface="맑은 고딕" pitchFamily="34" charset="-122"/>
-                <a:cs typeface="맑은 고딕" pitchFamily="34" charset="-120"/>
+                <a:latin typeface="강원교육새음" pitchFamily="34" charset="0"/>
+                <a:ea typeface="강원교육새음" pitchFamily="34" charset="-122"/>
+                <a:cs typeface="강원교육새음" pitchFamily="34" charset="-120"/>
               </a:rPr>
               <a:t>엘리베이터 하차 후 층 안내판을 확인해 주세요.</a:t>
             </a:r>
-            <a:endParaRPr lang="en-US" sz="1200" dirty="0"/>
+            <a:endParaRPr lang="en-US" sz="1500" dirty="0"/>
           </a:p>
         </p:txBody>
       </p:sp>
@@ -2582,7 +2582,7 @@
         <p:spPr>
           <a:xfrm>
             <a:off x="1097280" y="4407408"/>
-            <a:ext cx="1554480" cy="274320"/>
+            <a:ext cx="1737360" cy="274320"/>
           </a:xfrm>
           <a:prstGeom prst="rect">
             <a:avLst/>
@@ -2598,13 +2598,13 @@
               <a:buNone/>
             </a:pPr>
             <a:r>
-              <a:rPr lang="en-US" sz="1200" b="1" dirty="0">
+              <a:rPr lang="en-US" sz="1200" dirty="0">
                 <a:solidFill>
                   <a:srgbClr val="6D2E46"/>
                 </a:solidFill>
-                <a:latin typeface="맑은 고딕" pitchFamily="34" charset="0"/>
-                <a:ea typeface="맑은 고딕" pitchFamily="34" charset="-122"/>
-                <a:cs typeface="맑은 고딕" pitchFamily="34" charset="-120"/>
+                <a:latin typeface="KoPubWorld돋움체_Pro Bold" pitchFamily="34" charset="0"/>
+                <a:ea typeface="KoPubWorld돋움체_Pro Bold" pitchFamily="34" charset="-122"/>
+                <a:cs typeface="KoPubWorld돋움체_Pro Bold" pitchFamily="34" charset="-120"/>
               </a:rPr>
               <a:t>1층 랜드마크</a:t>
             </a:r>
@@ -2641,9 +2641,9 @@
                 <a:solidFill>
                   <a:srgbClr val="2C2229"/>
                 </a:solidFill>
-                <a:latin typeface="맑은 고딕" pitchFamily="34" charset="0"/>
-                <a:ea typeface="맑은 고딕" pitchFamily="34" charset="-122"/>
-                <a:cs typeface="맑은 고딕" pitchFamily="34" charset="-120"/>
+                <a:latin typeface="KoPubWorld돋움체_Pro Medium" pitchFamily="34" charset="0"/>
+                <a:ea typeface="KoPubWorld돋움체_Pro Medium" pitchFamily="34" charset="-122"/>
+                <a:cs typeface="KoPubWorld돋움체_Pro Medium" pitchFamily="34" charset="-120"/>
               </a:rPr>
               <a:t>올렌즈(OLENS) · GS25 · VIVA NAPOLI</a:t>
             </a:r>
@@ -2700,7 +2700,7 @@
         <p:spPr>
           <a:xfrm>
             <a:off x="1097280" y="5157216"/>
-            <a:ext cx="1554480" cy="274320"/>
+            <a:ext cx="1737360" cy="274320"/>
           </a:xfrm>
           <a:prstGeom prst="rect">
             <a:avLst/>
@@ -2716,13 +2716,13 @@
               <a:buNone/>
             </a:pPr>
             <a:r>
-              <a:rPr lang="en-US" sz="1200" b="1" dirty="0">
+              <a:rPr lang="en-US" sz="1200" dirty="0">
                 <a:solidFill>
                   <a:srgbClr val="6D2E46"/>
                 </a:solidFill>
-                <a:latin typeface="맑은 고딕" pitchFamily="34" charset="0"/>
-                <a:ea typeface="맑은 고딕" pitchFamily="34" charset="-122"/>
-                <a:cs typeface="맑은 고딕" pitchFamily="34" charset="-120"/>
+                <a:latin typeface="KoPubWorld돋움체_Pro Bold" pitchFamily="34" charset="0"/>
+                <a:ea typeface="KoPubWorld돋움체_Pro Bold" pitchFamily="34" charset="-122"/>
+                <a:cs typeface="KoPubWorld돋움체_Pro Bold" pitchFamily="34" charset="-120"/>
               </a:rPr>
               <a:t>건물 입구</a:t>
             </a:r>
@@ -2759,9 +2759,9 @@
                 <a:solidFill>
                   <a:srgbClr val="2C2229"/>
                 </a:solidFill>
-                <a:latin typeface="맑은 고딕" pitchFamily="34" charset="0"/>
-                <a:ea typeface="맑은 고딕" pitchFamily="34" charset="-122"/>
-                <a:cs typeface="맑은 고딕" pitchFamily="34" charset="-120"/>
+                <a:latin typeface="KoPubWorld돋움체_Pro Medium" pitchFamily="34" charset="0"/>
+                <a:ea typeface="KoPubWorld돋움체_Pro Medium" pitchFamily="34" charset="-122"/>
+                <a:cs typeface="KoPubWorld돋움체_Pro Medium" pitchFamily="34" charset="-120"/>
               </a:rPr>
               <a:t>GATE 1 통로 → 안쪽 GATE 4</a:t>
             </a:r>
@@ -2818,7 +2818,7 @@
         <p:spPr>
           <a:xfrm>
             <a:off x="1097280" y="5907024"/>
-            <a:ext cx="1554480" cy="274320"/>
+            <a:ext cx="1737360" cy="274320"/>
           </a:xfrm>
           <a:prstGeom prst="rect">
             <a:avLst/>
@@ -2834,13 +2834,13 @@
               <a:buNone/>
             </a:pPr>
             <a:r>
-              <a:rPr lang="en-US" sz="1200" b="1" dirty="0">
+              <a:rPr lang="en-US" sz="1200" dirty="0">
                 <a:solidFill>
                   <a:srgbClr val="6D2E46"/>
                 </a:solidFill>
-                <a:latin typeface="맑은 고딕" pitchFamily="34" charset="0"/>
-                <a:ea typeface="맑은 고딕" pitchFamily="34" charset="-122"/>
-                <a:cs typeface="맑은 고딕" pitchFamily="34" charset="-120"/>
+                <a:latin typeface="KoPubWorld돋움체_Pro Bold" pitchFamily="34" charset="0"/>
+                <a:ea typeface="KoPubWorld돋움체_Pro Bold" pitchFamily="34" charset="-122"/>
+                <a:cs typeface="KoPubWorld돋움체_Pro Bold" pitchFamily="34" charset="-120"/>
               </a:rPr>
               <a:t>엘리베이터</a:t>
             </a:r>
@@ -2877,9 +2877,9 @@
                 <a:solidFill>
                   <a:srgbClr val="2C2229"/>
                 </a:solidFill>
-                <a:latin typeface="맑은 고딕" pitchFamily="34" charset="0"/>
-                <a:ea typeface="맑은 고딕" pitchFamily="34" charset="-122"/>
-                <a:cs typeface="맑은 고딕" pitchFamily="34" charset="-120"/>
+                <a:latin typeface="KoPubWorld돋움체_Pro Medium" pitchFamily="34" charset="0"/>
+                <a:ea typeface="KoPubWorld돋움체_Pro Medium" pitchFamily="34" charset="-122"/>
+                <a:cs typeface="KoPubWorld돋움체_Pro Medium" pitchFamily="34" charset="-120"/>
               </a:rPr>
               <a:t>상가 / 오피스 전용 엘리베이터 홀</a:t>
             </a:r>
@@ -2918,8 +2918,8 @@
         </p:nvSpPr>
         <p:spPr>
           <a:xfrm>
-            <a:off x="5715000" y="4882896"/>
-            <a:ext cx="3017520" cy="292608"/>
+            <a:off x="5715000" y="4864608"/>
+            <a:ext cx="3017520" cy="310896"/>
           </a:xfrm>
           <a:prstGeom prst="rect">
             <a:avLst/>
@@ -2939,9 +2939,9 @@
                 <a:solidFill>
                   <a:srgbClr val="7B6A72"/>
                 </a:solidFill>
-                <a:latin typeface="맑은 고딕" pitchFamily="34" charset="0"/>
-                <a:ea typeface="맑은 고딕" pitchFamily="34" charset="-122"/>
-                <a:cs typeface="맑은 고딕" pitchFamily="34" charset="-120"/>
+                <a:latin typeface="KoPubWorld돋움체_Pro Light" pitchFamily="34" charset="0"/>
+                <a:ea typeface="KoPubWorld돋움체_Pro Light" pitchFamily="34" charset="-122"/>
+                <a:cs typeface="KoPubWorld돋움체_Pro Light" pitchFamily="34" charset="-120"/>
               </a:rPr>
               <a:t>GATE 1 통로 입구</a:t>
             </a:r>
@@ -2980,8 +2980,8 @@
         </p:nvSpPr>
         <p:spPr>
           <a:xfrm>
-            <a:off x="8988552" y="4882896"/>
-            <a:ext cx="2651760" cy="292608"/>
+            <a:off x="8988552" y="4864608"/>
+            <a:ext cx="2651760" cy="310896"/>
           </a:xfrm>
           <a:prstGeom prst="rect">
             <a:avLst/>
@@ -3001,9 +3001,9 @@
                 <a:solidFill>
                   <a:srgbClr val="7B6A72"/>
                 </a:solidFill>
-                <a:latin typeface="맑은 고딕" pitchFamily="34" charset="0"/>
-                <a:ea typeface="맑은 고딕" pitchFamily="34" charset="-122"/>
-                <a:cs typeface="맑은 고딕" pitchFamily="34" charset="-120"/>
+                <a:latin typeface="KoPubWorld돋움체_Pro Light" pitchFamily="34" charset="0"/>
+                <a:ea typeface="KoPubWorld돋움체_Pro Light" pitchFamily="34" charset="-122"/>
+                <a:cs typeface="KoPubWorld돋움체_Pro Light" pitchFamily="34" charset="-120"/>
               </a:rPr>
               <a:t>GATE 4 엘리베이터 홀</a:t>
             </a:r>
@@ -3058,13 +3058,13 @@
               <a:buNone/>
             </a:pPr>
             <a:r>
-              <a:rPr lang="en-US" sz="1400" b="1" dirty="0">
+              <a:rPr lang="en-US" sz="1400" dirty="0">
                 <a:solidFill>
                   <a:srgbClr val="2C2229"/>
                 </a:solidFill>
-                <a:latin typeface="맑은 고딕" pitchFamily="34" charset="0"/>
-                <a:ea typeface="맑은 고딕" pitchFamily="34" charset="-122"/>
-                <a:cs typeface="맑은 고딕" pitchFamily="34" charset="-120"/>
+                <a:latin typeface="KoPubWorld돋움체_Pro Bold" pitchFamily="34" charset="0"/>
+                <a:ea typeface="KoPubWorld돋움체_Pro Bold" pitchFamily="34" charset="-122"/>
+                <a:cs typeface="KoPubWorld돋움체_Pro Bold" pitchFamily="34" charset="-120"/>
               </a:rPr>
               <a:t>서울특별시 강서구 마곡동 773 힐스테이트 에코 마곡역 340호</a:t>
             </a:r>
@@ -3101,9 +3101,9 @@
                 <a:solidFill>
                   <a:srgbClr val="7B6A72"/>
                 </a:solidFill>
-                <a:latin typeface="맑은 고딕" pitchFamily="34" charset="0"/>
-                <a:ea typeface="맑은 고딕" pitchFamily="34" charset="-122"/>
-                <a:cs typeface="맑은 고딕" pitchFamily="34" charset="-120"/>
+                <a:latin typeface="KoPubWorld돋움체_Pro Medium" pitchFamily="34" charset="0"/>
+                <a:ea typeface="KoPubWorld돋움체_Pro Medium" pitchFamily="34" charset="-122"/>
+                <a:cs typeface="KoPubWorld돋움체_Pro Medium" pitchFamily="34" charset="-120"/>
               </a:rPr>
               <a:t>지하철 5호선 마곡역 3번 출구에서 도보 1분</a:t>
             </a:r>
